--- a/Б.7.5_Модули/Б.7.5_Модуль4_Сварка_испытания_пуск.pptx
+++ b/Б.7.5_Модули/Б.7.5_Модуль4_Сварка_испытания_пуск.pptx
@@ -4303,7 +4303,7 @@
                 </a:solidFill>
                 <a:latin typeface="Inter"/>
               </a:rPr>
-              <a:t>Требования к сварщикам и технологии сварки на ОПО; допуск к газоопасным сварочным работам.</a:t>
+              <a:t>Сварка — по ПТД, аттестованные сварщики, допускные швы на объекте (ФНП № 519, п. 9, 18, 32).</a:t>
             </a:r>
           </a:p>
         </p:txBody>
@@ -4373,7 +4373,7 @@
                 </a:solidFill>
                 <a:latin typeface="Inter"/>
               </a:rPr>
-              <a:t>Визуальный и неразрушающий контроль сварных швов; оформление результатов контроля.</a:t>
+              <a:t>НК сварных соединений — входной, операционный, приемочный контроль (ФНП № 519, п. 34–38).</a:t>
             </a:r>
           </a:p>
         </p:txBody>
@@ -4443,7 +4443,7 @@
                 </a:solidFill>
                 <a:latin typeface="Inter"/>
               </a:rPr>
-              <a:t>Запрет эксплуатации газопроводов с дефектными сварными соединениями.</a:t>
+              <a:t>На действующих газопроводах — сварка при 0,0004–0,002 МПа; без отключения и заглушек в колодцах запрещено (ФНП № 531, п. 155–156).</a:t>
             </a:r>
           </a:p>
         </p:txBody>
@@ -4513,7 +4513,7 @@
                 </a:solidFill>
                 <a:latin typeface="Inter"/>
               </a:rPr>
-              <a:t>Ремонт дефектов: повторная сварка, выборочная замена участков по результатам контроля.</a:t>
+              <a:t>Сварные швы в стенах и перекрытиях при СМР запрещены (ТР п. 59).</a:t>
             </a:r>
           </a:p>
         </p:txBody>
@@ -4757,7 +4757,7 @@
                 </a:solidFill>
                 <a:latin typeface="Inter"/>
               </a:rPr>
-              <a:t>После СМР и ремонта — испытания по проекту; при отсутствии проектных требований — по СП.</a:t>
+              <a:t>После сварки — испытания на прочность и герметичность; после ремонта — на герметичность (ФНП № 531, п. 29).</a:t>
             </a:r>
           </a:p>
         </p:txBody>
@@ -4827,7 +4827,7 @@
                 </a:solidFill>
                 <a:latin typeface="Inter"/>
               </a:rPr>
-              <a:t>Испытание на прочность и герметичность после сварочных работ обязательно.</a:t>
+              <a:t>Контрольная опрессовка: наружные газопроводы — 0,02 МПа; ГРП/ГРУ — 0,01 МПа (ФНП № 531, п. 151).</a:t>
             </a:r>
           </a:p>
         </p:txBody>
@@ -4897,7 +4897,7 @@
                 </a:solidFill>
                 <a:latin typeface="Inter"/>
               </a:rPr>
-              <a:t>Контрольная опрессовка оборудования и газопроводов ГРП давлением 0,01 МПа.</a:t>
+              <a:t>ПЭ-трубы: испытания не ранее чем через 24 ч после сварки последнего стыка (ТР п. 62).</a:t>
             </a:r>
           </a:p>
         </p:txBody>
@@ -4967,7 +4967,7 @@
                 </a:solidFill>
                 <a:latin typeface="Inter"/>
               </a:rPr>
-              <a:t>Оформление актов испытаний; допуск к пуску газа только после положительных результатов.</a:t>
+              <a:t>Пуск газа — только после положительных испытаний и записи в наряд-допуске.</a:t>
             </a:r>
           </a:p>
         </p:txBody>
@@ -5246,7 +5246,7 @@
                 </a:solidFill>
                 <a:latin typeface="Inter"/>
               </a:rPr>
-              <a:t>Пуск газа выполняется по плану после продувки, проверки герметичности запорной арматуры и отсутствия заглушек. Снятие заглушек — после обхода, ТО и испытаний. Приёмка законченного строительством объекта — комиссией с оформлением актов и внесением сведений в реестр.</a:t>
+              <a:t>Присоединение вновь построенных газопроводов — только перед пуском газа; перед присоединением — осмотр и контрольная опрессовка (ФНП № 531, п. 150). Продувка газом до вытеснения воздуха; окончание — анализ и сжигание проб (ФНП № 531, п. 165). Приёмка — комиссией с представителем Ростехнадзора (ТР п. 93).</a:t>
             </a:r>
           </a:p>
         </p:txBody>
@@ -5281,7 +5281,7 @@
                 </a:solidFill>
                 <a:latin typeface="Inter"/>
               </a:rPr>
-              <a:t>Ввод в эксплуатацию без паспортов, исполнительной документации и актов испытаний не допускается.</a:t>
+              <a:t>Ввод без паспортов, исполнительной документации, протоколов испытаний и актов приёмки не допускается.</a:t>
             </a:r>
           </a:p>
         </p:txBody>
@@ -5560,7 +5560,7 @@
                 </a:solidFill>
                 <a:latin typeface="Inter"/>
               </a:rPr>
-              <a:t>Сварка и НК — критический этап обеспечения герметичности газопроводов.</a:t>
+              <a:t>Сварка — по ПТД, аттестованные сварщики, допускные швы (ФНП № 519, п. 9, 18, 32).</a:t>
             </a:r>
           </a:p>
         </p:txBody>
@@ -5630,7 +5630,7 @@
                 </a:solidFill>
                 <a:latin typeface="Inter"/>
               </a:rPr>
-              <a:t>Испытания на прочность и герметичность обязательны после сварки и ремонта.</a:t>
+              <a:t>На действующих газопроводах — сварка при 0,0004–0,002 МПа (ФНП № 531, п. 155–156).</a:t>
             </a:r>
           </a:p>
         </p:txBody>
@@ -5700,7 +5700,7 @@
                 </a:solidFill>
                 <a:latin typeface="Inter"/>
               </a:rPr>
-              <a:t>Пуск газа — только после положительных испытаний и оформления документов.</a:t>
+              <a:t>Испытания: герметичность после ремонта, опрессовка 0,02/0,01 МПа (ФНП № 531, п. 29, 151).</a:t>
             </a:r>
           </a:p>
         </p:txBody>
@@ -5770,7 +5770,7 @@
                 </a:solidFill>
                 <a:latin typeface="Inter"/>
               </a:rPr>
-              <a:t>Приёмка объекта завершает цикл строительства и является условием ввода в эксплуатацию.</a:t>
+              <a:t>Пуск газа — после продувки и опрессовки; приёмка — комиссией (ФНП № 531, п. 150, 165; ТР п. 93).</a:t>
             </a:r>
           </a:p>
         </p:txBody>
